--- a/docs/ヨルケア事業化プラン_伊藤さん_20260905.pptx
+++ b/docs/ヨルケア事業化プラン_伊藤さん_20260905.pptx
@@ -691,7 +691,7 @@
           <a:p>
             <a:r>
               <a:rPr lang="en-US" dirty="0"/>
-              <a:t>決め切ってはいけないと思っている、という言い方をする。売上が立つ前に数字を詰めると、かえってまとまらない。</a:t>
+              <a:t>決め切ってはいけないと思っている、という言い方をする。即答も期限も求めない。</a:t>
             </a:r>
             <a:endParaRPr lang="en-US" dirty="0"/>
           </a:p>
@@ -1571,7 +1571,7 @@
           <a:p>
             <a:r>
               <a:rPr lang="en-US" dirty="0"/>
-              <a:t>誠実な見せ方にしている理由を言う。言い切らないほうが企業に信用される。</a:t>
+              <a:t>誠実な見せ方にしている理由を言う。対象は休職から復職した働く方で、障がい福祉サービスの枠ではない。</a:t>
             </a:r>
             <a:endParaRPr lang="en-US" dirty="0"/>
           </a:p>
@@ -3058,7 +3058,7 @@
                 <a:ea typeface="Meiryo" pitchFamily="34" charset="-122"/>
                 <a:cs typeface="Meiryo" pitchFamily="34" charset="-120"/>
               </a:rPr>
-              <a:t>12項目は「これから一緒に決める」。報酬と収益配分は、今日は保留</a:t>
+              <a:t>12項目は今日決めません。これから一緒に決めていきます</a:t>
             </a:r>
             <a:endParaRPr lang="en-US" sz="3000" dirty="0"/>
           </a:p>
@@ -3288,11 +3288,11 @@
             </a:avLst>
           </a:prstGeom>
           <a:solidFill>
-            <a:srgbClr val="FFF7E0"/>
+            <a:srgbClr val="F2F4FB"/>
           </a:solidFill>
           <a:ln w="12700">
             <a:solidFill>
-              <a:srgbClr val="B8860B"/>
+              <a:srgbClr val="D9DDEE"/>
             </a:solidFill>
             <a:prstDash val="solid"/>
           </a:ln>
@@ -3328,13 +3328,13 @@
             <a:r>
               <a:rPr lang="en-US" sz="1150" dirty="0">
                 <a:solidFill>
-                  <a:srgbClr val="8A6508"/>
-                </a:solidFill>
-                <a:latin typeface="Meiryo" pitchFamily="34" charset="0"/>
-                <a:ea typeface="Meiryo" pitchFamily="34" charset="-122"/>
-                <a:cs typeface="Meiryo" pitchFamily="34" charset="-120"/>
-              </a:rPr>
-              <a:t>モニター期間中の報酬</a:t>
+                  <a:srgbClr val="1A2148"/>
+                </a:solidFill>
+                <a:latin typeface="Meiryo" pitchFamily="34" charset="0"/>
+                <a:ea typeface="Meiryo" pitchFamily="34" charset="-122"/>
+                <a:cs typeface="Meiryo" pitchFamily="34" charset="-120"/>
+              </a:rPr>
+              <a:t>精神科医・安全責任者の役割範囲</a:t>
             </a:r>
             <a:endParaRPr lang="en-US" sz="1150" dirty="0"/>
           </a:p>
@@ -3349,75 +3349,6 @@
         <p:spPr>
           <a:xfrm>
             <a:off x="640080" y="2798064"/>
-            <a:ext cx="2522144" cy="676656"/>
-          </a:xfrm>
-          <a:prstGeom prst="roundRect">
-            <a:avLst>
-              <a:gd name="adj" fmla="val 10811"/>
-            </a:avLst>
-          </a:prstGeom>
-          <a:solidFill>
-            <a:srgbClr val="FFF7E0"/>
-          </a:solidFill>
-          <a:ln w="12700">
-            <a:solidFill>
-              <a:srgbClr val="B8860B"/>
-            </a:solidFill>
-            <a:prstDash val="solid"/>
-          </a:ln>
-        </p:spPr>
-      </p:sp>
-      <p:sp>
-        <p:nvSpPr>
-          <p:cNvPr id="13" name="Text 11"/>
-          <p:cNvSpPr txBox="1"/>
-          <p:nvPr/>
-        </p:nvSpPr>
-        <p:spPr>
-          <a:xfrm>
-            <a:off x="841248" y="2926080"/>
-            <a:ext cx="2119808" cy="457200"/>
-          </a:xfrm>
-          <a:prstGeom prst="rect">
-            <a:avLst/>
-          </a:prstGeom>
-          <a:noFill/>
-          <a:ln/>
-        </p:spPr>
-        <p:txBody>
-          <a:bodyPr wrap="square" lIns="0" tIns="0" rIns="0" bIns="0" rtlCol="0" anchor="t"/>
-          <a:lstStyle/>
-          <a:p>
-            <a:pPr indent="0" marL="0">
-              <a:lnSpc>
-                <a:spcPts val="1700"/>
-              </a:lnSpc>
-              <a:buNone/>
-            </a:pPr>
-            <a:r>
-              <a:rPr lang="en-US" sz="1150" dirty="0">
-                <a:solidFill>
-                  <a:srgbClr val="8A6508"/>
-                </a:solidFill>
-                <a:latin typeface="Meiryo" pitchFamily="34" charset="0"/>
-                <a:ea typeface="Meiryo" pitchFamily="34" charset="-122"/>
-                <a:cs typeface="Meiryo" pitchFamily="34" charset="-120"/>
-              </a:rPr>
-              <a:t>有料化・企業受注後の収益配分</a:t>
-            </a:r>
-            <a:endParaRPr lang="en-US" sz="1150" dirty="0"/>
-          </a:p>
-        </p:txBody>
-      </p:sp>
-      <p:sp>
-        <p:nvSpPr>
-          <p:cNvPr id="14" name="Shape 12"/>
-          <p:cNvSpPr/>
-          <p:nvPr/>
-        </p:nvSpPr>
-        <p:spPr>
-          <a:xfrm>
-            <a:off x="3436544" y="2798064"/>
             <a:ext cx="2522144" cy="676656"/>
           </a:xfrm>
           <a:prstGeom prst="roundRect">
@@ -3438,13 +3369,13 @@
       </p:sp>
       <p:sp>
         <p:nvSpPr>
-          <p:cNvPr id="15" name="Text 13"/>
-          <p:cNvSpPr txBox="1"/>
-          <p:nvPr/>
-        </p:nvSpPr>
-        <p:spPr>
-          <a:xfrm>
-            <a:off x="3637712" y="2926080"/>
+          <p:cNvPr id="13" name="Text 11"/>
+          <p:cNvSpPr txBox="1"/>
+          <p:nvPr/>
+        </p:nvSpPr>
+        <p:spPr>
+          <a:xfrm>
+            <a:off x="841248" y="2926080"/>
             <a:ext cx="2119808" cy="457200"/>
           </a:xfrm>
           <a:prstGeom prst="rect">
@@ -3472,7 +3403,7 @@
                 <a:ea typeface="Meiryo" pitchFamily="34" charset="-122"/>
                 <a:cs typeface="Meiryo" pitchFamily="34" charset="-120"/>
               </a:rPr>
-              <a:t>精神科医・安全責任者の役割範囲</a:t>
+              <a:t>測る指標</a:t>
             </a:r>
             <a:endParaRPr lang="en-US" sz="1150" dirty="0"/>
           </a:p>
@@ -3480,13 +3411,13 @@
       </p:sp>
       <p:sp>
         <p:nvSpPr>
-          <p:cNvPr id="16" name="Shape 14"/>
+          <p:cNvPr id="14" name="Shape 12"/>
           <p:cNvSpPr/>
           <p:nvPr/>
         </p:nvSpPr>
         <p:spPr>
           <a:xfrm>
-            <a:off x="6233008" y="2798064"/>
+            <a:off x="3436544" y="2798064"/>
             <a:ext cx="2522144" cy="676656"/>
           </a:xfrm>
           <a:prstGeom prst="roundRect">
@@ -3507,13 +3438,13 @@
       </p:sp>
       <p:sp>
         <p:nvSpPr>
-          <p:cNvPr id="17" name="Text 15"/>
-          <p:cNvSpPr txBox="1"/>
-          <p:nvPr/>
-        </p:nvSpPr>
-        <p:spPr>
-          <a:xfrm>
-            <a:off x="6434176" y="2926080"/>
+          <p:cNvPr id="15" name="Text 13"/>
+          <p:cNvSpPr txBox="1"/>
+          <p:nvPr/>
+        </p:nvSpPr>
+        <p:spPr>
+          <a:xfrm>
+            <a:off x="3637712" y="2926080"/>
             <a:ext cx="2119808" cy="457200"/>
           </a:xfrm>
           <a:prstGeom prst="rect">
@@ -3541,7 +3472,7 @@
                 <a:ea typeface="Meiryo" pitchFamily="34" charset="-122"/>
                 <a:cs typeface="Meiryo" pitchFamily="34" charset="-120"/>
               </a:rPr>
-              <a:t>測る指標</a:t>
+              <a:t>参加者情報の扱い</a:t>
             </a:r>
             <a:endParaRPr lang="en-US" sz="1150" dirty="0"/>
           </a:p>
@@ -3549,13 +3480,13 @@
       </p:sp>
       <p:sp>
         <p:nvSpPr>
-          <p:cNvPr id="18" name="Shape 16"/>
+          <p:cNvPr id="16" name="Shape 14"/>
           <p:cNvSpPr/>
           <p:nvPr/>
         </p:nvSpPr>
         <p:spPr>
           <a:xfrm>
-            <a:off x="9029471" y="2798064"/>
+            <a:off x="6233008" y="2798064"/>
             <a:ext cx="2522144" cy="676656"/>
           </a:xfrm>
           <a:prstGeom prst="roundRect">
@@ -3576,13 +3507,13 @@
       </p:sp>
       <p:sp>
         <p:nvSpPr>
-          <p:cNvPr id="19" name="Text 17"/>
-          <p:cNvSpPr txBox="1"/>
-          <p:nvPr/>
-        </p:nvSpPr>
-        <p:spPr>
-          <a:xfrm>
-            <a:off x="9230639" y="2926080"/>
+          <p:cNvPr id="17" name="Text 15"/>
+          <p:cNvSpPr txBox="1"/>
+          <p:nvPr/>
+        </p:nvSpPr>
+        <p:spPr>
+          <a:xfrm>
+            <a:off x="6434176" y="2926080"/>
             <a:ext cx="2119808" cy="457200"/>
           </a:xfrm>
           <a:prstGeom prst="rect">
@@ -3610,7 +3541,7 @@
                 <a:ea typeface="Meiryo" pitchFamily="34" charset="-122"/>
                 <a:cs typeface="Meiryo" pitchFamily="34" charset="-120"/>
               </a:rPr>
-              <a:t>参加者情報の扱い</a:t>
+              <a:t>続ける・やめるの判断基準</a:t>
             </a:r>
             <a:endParaRPr lang="en-US" sz="1150" dirty="0"/>
           </a:p>
@@ -3618,13 +3549,13 @@
       </p:sp>
       <p:sp>
         <p:nvSpPr>
-          <p:cNvPr id="20" name="Shape 18"/>
+          <p:cNvPr id="18" name="Shape 16"/>
           <p:cNvSpPr/>
           <p:nvPr/>
         </p:nvSpPr>
         <p:spPr>
           <a:xfrm>
-            <a:off x="640080" y="3584448"/>
+            <a:off x="9029471" y="2798064"/>
             <a:ext cx="2522144" cy="676656"/>
           </a:xfrm>
           <a:prstGeom prst="roundRect">
@@ -3645,13 +3576,13 @@
       </p:sp>
       <p:sp>
         <p:nvSpPr>
-          <p:cNvPr id="21" name="Text 19"/>
-          <p:cNvSpPr txBox="1"/>
-          <p:nvPr/>
-        </p:nvSpPr>
-        <p:spPr>
-          <a:xfrm>
-            <a:off x="841248" y="3712464"/>
+          <p:cNvPr id="19" name="Text 17"/>
+          <p:cNvSpPr txBox="1"/>
+          <p:nvPr/>
+        </p:nvSpPr>
+        <p:spPr>
+          <a:xfrm>
+            <a:off x="9230639" y="2926080"/>
             <a:ext cx="2119808" cy="457200"/>
           </a:xfrm>
           <a:prstGeom prst="rect">
@@ -3679,7 +3610,7 @@
                 <a:ea typeface="Meiryo" pitchFamily="34" charset="-122"/>
                 <a:cs typeface="Meiryo" pitchFamily="34" charset="-120"/>
               </a:rPr>
-              <a:t>続ける・やめるの判断基準</a:t>
+              <a:t>判断する場をいつ持つか</a:t>
             </a:r>
             <a:endParaRPr lang="en-US" sz="1150" dirty="0"/>
           </a:p>
@@ -3687,13 +3618,13 @@
       </p:sp>
       <p:sp>
         <p:nvSpPr>
-          <p:cNvPr id="22" name="Shape 20"/>
+          <p:cNvPr id="20" name="Shape 18"/>
           <p:cNvSpPr/>
           <p:nvPr/>
         </p:nvSpPr>
         <p:spPr>
           <a:xfrm>
-            <a:off x="3436544" y="3584448"/>
+            <a:off x="640080" y="3584448"/>
             <a:ext cx="2522144" cy="676656"/>
           </a:xfrm>
           <a:prstGeom prst="roundRect">
@@ -3714,13 +3645,13 @@
       </p:sp>
       <p:sp>
         <p:nvSpPr>
-          <p:cNvPr id="23" name="Text 21"/>
-          <p:cNvSpPr txBox="1"/>
-          <p:nvPr/>
-        </p:nvSpPr>
-        <p:spPr>
-          <a:xfrm>
-            <a:off x="3637712" y="3712464"/>
+          <p:cNvPr id="21" name="Text 19"/>
+          <p:cNvSpPr txBox="1"/>
+          <p:nvPr/>
+        </p:nvSpPr>
+        <p:spPr>
+          <a:xfrm>
+            <a:off x="841248" y="3712464"/>
             <a:ext cx="2119808" cy="457200"/>
           </a:xfrm>
           <a:prstGeom prst="rect">
@@ -3748,7 +3679,7 @@
                 <a:ea typeface="Meiryo" pitchFamily="34" charset="-122"/>
                 <a:cs typeface="Meiryo" pitchFamily="34" charset="-120"/>
               </a:rPr>
-              <a:t>判断する場をいつ持つか</a:t>
+              <a:t>ほか（全12項目）</a:t>
             </a:r>
             <a:endParaRPr lang="en-US" sz="1150" dirty="0"/>
           </a:p>
@@ -3756,149 +3687,13 @@
       </p:sp>
       <p:sp>
         <p:nvSpPr>
-          <p:cNvPr id="24" name="Shape 22"/>
+          <p:cNvPr id="22" name="Shape 20"/>
           <p:cNvSpPr/>
           <p:nvPr/>
         </p:nvSpPr>
         <p:spPr>
           <a:xfrm>
-            <a:off x="6233008" y="3584448"/>
-            <a:ext cx="2522144" cy="676656"/>
-          </a:xfrm>
-          <a:prstGeom prst="roundRect">
-            <a:avLst>
-              <a:gd name="adj" fmla="val 10811"/>
-            </a:avLst>
-          </a:prstGeom>
-          <a:solidFill>
-            <a:srgbClr val="F2F4FB"/>
-          </a:solidFill>
-          <a:ln w="12700">
-            <a:solidFill>
-              <a:srgbClr val="D9DDEE"/>
-            </a:solidFill>
-            <a:prstDash val="solid"/>
-          </a:ln>
-        </p:spPr>
-      </p:sp>
-      <p:sp>
-        <p:nvSpPr>
-          <p:cNvPr id="25" name="Text 23"/>
-          <p:cNvSpPr txBox="1"/>
-          <p:nvPr/>
-        </p:nvSpPr>
-        <p:spPr>
-          <a:xfrm>
-            <a:off x="6434176" y="3712464"/>
-            <a:ext cx="2119808" cy="457200"/>
-          </a:xfrm>
-          <a:prstGeom prst="rect">
-            <a:avLst/>
-          </a:prstGeom>
-          <a:noFill/>
-          <a:ln/>
-        </p:spPr>
-        <p:txBody>
-          <a:bodyPr wrap="square" lIns="0" tIns="0" rIns="0" bIns="0" rtlCol="0" anchor="t"/>
-          <a:lstStyle/>
-          <a:p>
-            <a:pPr indent="0" marL="0">
-              <a:lnSpc>
-                <a:spcPts val="1700"/>
-              </a:lnSpc>
-              <a:buNone/>
-            </a:pPr>
-            <a:r>
-              <a:rPr lang="en-US" sz="1150" dirty="0">
-                <a:solidFill>
-                  <a:srgbClr val="1A2148"/>
-                </a:solidFill>
-                <a:latin typeface="Meiryo" pitchFamily="34" charset="0"/>
-                <a:ea typeface="Meiryo" pitchFamily="34" charset="-122"/>
-                <a:cs typeface="Meiryo" pitchFamily="34" charset="-120"/>
-              </a:rPr>
-              <a:t>ほか（全12項目）</a:t>
-            </a:r>
-            <a:endParaRPr lang="en-US" sz="1150" dirty="0"/>
-          </a:p>
-        </p:txBody>
-      </p:sp>
-      <p:sp>
-        <p:nvSpPr>
-          <p:cNvPr id="26" name="Shape 24"/>
-          <p:cNvSpPr/>
-          <p:nvPr/>
-        </p:nvSpPr>
-        <p:spPr>
-          <a:xfrm>
-            <a:off x="640080" y="4590288"/>
-            <a:ext cx="146304" cy="146304"/>
-          </a:xfrm>
-          <a:prstGeom prst="ellipse">
-            <a:avLst/>
-          </a:prstGeom>
-          <a:solidFill>
-            <a:srgbClr val="B8860B"/>
-          </a:solidFill>
-          <a:ln w="12700">
-            <a:solidFill>
-              <a:srgbClr val="B8860B"/>
-            </a:solidFill>
-            <a:prstDash val="solid"/>
-          </a:ln>
-        </p:spPr>
-      </p:sp>
-      <p:sp>
-        <p:nvSpPr>
-          <p:cNvPr id="27" name="Text 25"/>
-          <p:cNvSpPr txBox="1"/>
-          <p:nvPr/>
-        </p:nvSpPr>
-        <p:spPr>
-          <a:xfrm>
-            <a:off x="914400" y="4526280"/>
-            <a:ext cx="7315200" cy="274320"/>
-          </a:xfrm>
-          <a:prstGeom prst="rect">
-            <a:avLst/>
-          </a:prstGeom>
-          <a:noFill/>
-          <a:ln/>
-        </p:spPr>
-        <p:txBody>
-          <a:bodyPr wrap="square" lIns="0" tIns="0" rIns="0" bIns="0" rtlCol="0" anchor="t"/>
-          <a:lstStyle/>
-          <a:p>
-            <a:pPr indent="0" marL="0">
-              <a:lnSpc>
-                <a:spcPts val="2200"/>
-              </a:lnSpc>
-              <a:buNone/>
-            </a:pPr>
-            <a:r>
-              <a:rPr lang="en-US" sz="1200" b="1" dirty="0">
-                <a:solidFill>
-                  <a:srgbClr val="B8860B"/>
-                </a:solidFill>
-                <a:latin typeface="Meiryo" pitchFamily="34" charset="0"/>
-                <a:ea typeface="Meiryo" pitchFamily="34" charset="-122"/>
-                <a:cs typeface="Meiryo" pitchFamily="34" charset="-120"/>
-              </a:rPr>
-              <a:t>＝ 今日は保留にさせてください</a:t>
-            </a:r>
-            <a:endParaRPr lang="en-US" sz="1200" dirty="0"/>
-          </a:p>
-        </p:txBody>
-      </p:sp>
-      <p:sp>
-        <p:nvSpPr>
-          <p:cNvPr id="28" name="Shape 26"/>
-          <p:cNvSpPr/>
-          <p:nvPr/>
-        </p:nvSpPr>
-        <p:spPr>
-          <a:xfrm>
-            <a:off x="640080" y="4983480"/>
+            <a:off x="640080" y="4663440"/>
             <a:ext cx="10911535" cy="914400"/>
           </a:xfrm>
           <a:prstGeom prst="roundRect">
@@ -3919,13 +3714,13 @@
       </p:sp>
       <p:sp>
         <p:nvSpPr>
-          <p:cNvPr id="29" name="Text 27"/>
-          <p:cNvSpPr txBox="1"/>
-          <p:nvPr/>
-        </p:nvSpPr>
-        <p:spPr>
-          <a:xfrm>
-            <a:off x="960120" y="5193792"/>
+          <p:cNvPr id="23" name="Text 21"/>
+          <p:cNvSpPr txBox="1"/>
+          <p:nvPr/>
+        </p:nvSpPr>
+        <p:spPr>
+          <a:xfrm>
+            <a:off x="960120" y="4873752"/>
             <a:ext cx="10271455" cy="548640"/>
           </a:xfrm>
           <a:prstGeom prst="rect">
@@ -3961,7 +3756,7 @@
       </p:sp>
       <p:sp>
         <p:nvSpPr>
-          <p:cNvPr id="30" name="Text 28"/>
+          <p:cNvPr id="24" name="Text 22"/>
           <p:cNvSpPr txBox="1"/>
           <p:nvPr/>
         </p:nvSpPr>
@@ -5617,7 +5412,7 @@
         <p:spPr>
           <a:xfrm>
             <a:off x="640080" y="3913632"/>
-            <a:ext cx="3429000" cy="713232"/>
+            <a:ext cx="10911535" cy="713232"/>
           </a:xfrm>
           <a:prstGeom prst="roundRect">
             <a:avLst>
@@ -5643,8 +5438,8 @@
         </p:nvSpPr>
         <p:spPr>
           <a:xfrm>
-            <a:off x="841248" y="4069080"/>
-            <a:ext cx="3063240" cy="457200"/>
+            <a:off x="914400" y="4096512"/>
+            <a:ext cx="10362895" cy="365760"/>
           </a:xfrm>
           <a:prstGeom prst="rect">
             <a:avLst/>
@@ -5657,13 +5452,10 @@
           <a:lstStyle/>
           <a:p>
             <a:pPr indent="0" marL="0">
-              <a:lnSpc>
-                <a:spcPts val="1700"/>
-              </a:lnSpc>
-              <a:buNone/>
-            </a:pPr>
-            <a:r>
-              <a:rPr lang="en-US" sz="1200" dirty="0">
+              <a:buNone/>
+            </a:pPr>
+            <a:r>
+              <a:rPr lang="en-US" sz="1300" dirty="0">
                 <a:solidFill>
                   <a:srgbClr val="C3C9E4"/>
                 </a:solidFill>
@@ -5671,195 +5463,54 @@
                 <a:ea typeface="Meiryo" pitchFamily="34" charset="-122"/>
                 <a:cs typeface="Meiryo" pitchFamily="34" charset="-120"/>
               </a:rPr>
-              <a:t>モニター期間中の報酬</a:t>
-            </a:r>
-            <a:endParaRPr lang="en-US" sz="1200" dirty="0"/>
-          </a:p>
-        </p:txBody>
-      </p:sp>
-      <p:sp>
-        <p:nvSpPr>
-          <p:cNvPr id="9" name="Shape 7"/>
-          <p:cNvSpPr/>
-          <p:nvPr/>
-        </p:nvSpPr>
-        <p:spPr>
-          <a:xfrm>
-            <a:off x="4343400" y="3913632"/>
-            <a:ext cx="3429000" cy="713232"/>
-          </a:xfrm>
-          <a:prstGeom prst="roundRect">
-            <a:avLst>
-              <a:gd name="adj" fmla="val 10256"/>
-            </a:avLst>
-          </a:prstGeom>
-          <a:solidFill>
-            <a:srgbClr val="141B3C"/>
-          </a:solidFill>
-          <a:ln w="12700">
-            <a:solidFill>
-              <a:srgbClr val="343D6E"/>
-            </a:solidFill>
-            <a:prstDash val="solid"/>
-          </a:ln>
-        </p:spPr>
+              <a:t>役割分担と稼働の細部（全12項目）は、これから一緒に決めていきます</a:t>
+            </a:r>
+            <a:endParaRPr lang="en-US" sz="1300" dirty="0"/>
+          </a:p>
+        </p:txBody>
+      </p:sp>
+      <p:sp>
+        <p:nvSpPr>
+          <p:cNvPr id="9" name="Text 7"/>
+          <p:cNvSpPr txBox="1"/>
+          <p:nvPr/>
+        </p:nvSpPr>
+        <p:spPr>
+          <a:xfrm>
+            <a:off x="640080" y="4937760"/>
+            <a:ext cx="10911535" cy="365760"/>
+          </a:xfrm>
+          <a:prstGeom prst="rect">
+            <a:avLst/>
+          </a:prstGeom>
+          <a:noFill/>
+          <a:ln/>
+        </p:spPr>
+        <p:txBody>
+          <a:bodyPr wrap="square" lIns="0" tIns="0" rIns="0" bIns="0" rtlCol="0" anchor="ctr"/>
+          <a:lstStyle/>
+          <a:p>
+            <a:pPr indent="0" marL="0">
+              <a:buNone/>
+            </a:pPr>
+            <a:r>
+              <a:rPr lang="en-US" sz="1100" dirty="0">
+                <a:solidFill>
+                  <a:srgbClr val="8A93B8"/>
+                </a:solidFill>
+                <a:latin typeface="Meiryo" pitchFamily="34" charset="0"/>
+                <a:ea typeface="Meiryo" pitchFamily="34" charset="-122"/>
+                <a:cs typeface="Meiryo" pitchFamily="34" charset="-120"/>
+              </a:rPr>
+              <a:t>必要なタイミングで、そのつどご相談させてください。</a:t>
+            </a:r>
+            <a:endParaRPr lang="en-US" sz="1100" dirty="0"/>
+          </a:p>
+        </p:txBody>
       </p:sp>
       <p:sp>
         <p:nvSpPr>
           <p:cNvPr id="10" name="Text 8"/>
-          <p:cNvSpPr txBox="1"/>
-          <p:nvPr/>
-        </p:nvSpPr>
-        <p:spPr>
-          <a:xfrm>
-            <a:off x="4544568" y="4069080"/>
-            <a:ext cx="3063240" cy="457200"/>
-          </a:xfrm>
-          <a:prstGeom prst="rect">
-            <a:avLst/>
-          </a:prstGeom>
-          <a:noFill/>
-          <a:ln/>
-        </p:spPr>
-        <p:txBody>
-          <a:bodyPr wrap="square" lIns="0" tIns="0" rIns="0" bIns="0" rtlCol="0" anchor="ctr"/>
-          <a:lstStyle/>
-          <a:p>
-            <a:pPr indent="0" marL="0">
-              <a:lnSpc>
-                <a:spcPts val="1700"/>
-              </a:lnSpc>
-              <a:buNone/>
-            </a:pPr>
-            <a:r>
-              <a:rPr lang="en-US" sz="1200" dirty="0">
-                <a:solidFill>
-                  <a:srgbClr val="C3C9E4"/>
-                </a:solidFill>
-                <a:latin typeface="Meiryo" pitchFamily="34" charset="0"/>
-                <a:ea typeface="Meiryo" pitchFamily="34" charset="-122"/>
-                <a:cs typeface="Meiryo" pitchFamily="34" charset="-120"/>
-              </a:rPr>
-              <a:t>有料化・企業受注後の収益配分</a:t>
-            </a:r>
-            <a:endParaRPr lang="en-US" sz="1200" dirty="0"/>
-          </a:p>
-        </p:txBody>
-      </p:sp>
-      <p:sp>
-        <p:nvSpPr>
-          <p:cNvPr id="11" name="Shape 9"/>
-          <p:cNvSpPr/>
-          <p:nvPr/>
-        </p:nvSpPr>
-        <p:spPr>
-          <a:xfrm>
-            <a:off x="8046720" y="3913632"/>
-            <a:ext cx="3429000" cy="713232"/>
-          </a:xfrm>
-          <a:prstGeom prst="roundRect">
-            <a:avLst>
-              <a:gd name="adj" fmla="val 10256"/>
-            </a:avLst>
-          </a:prstGeom>
-          <a:solidFill>
-            <a:srgbClr val="141B3C"/>
-          </a:solidFill>
-          <a:ln w="12700">
-            <a:solidFill>
-              <a:srgbClr val="343D6E"/>
-            </a:solidFill>
-            <a:prstDash val="solid"/>
-          </a:ln>
-        </p:spPr>
-      </p:sp>
-      <p:sp>
-        <p:nvSpPr>
-          <p:cNvPr id="12" name="Text 10"/>
-          <p:cNvSpPr txBox="1"/>
-          <p:nvPr/>
-        </p:nvSpPr>
-        <p:spPr>
-          <a:xfrm>
-            <a:off x="8247888" y="4069080"/>
-            <a:ext cx="3063240" cy="457200"/>
-          </a:xfrm>
-          <a:prstGeom prst="rect">
-            <a:avLst/>
-          </a:prstGeom>
-          <a:noFill/>
-          <a:ln/>
-        </p:spPr>
-        <p:txBody>
-          <a:bodyPr wrap="square" lIns="0" tIns="0" rIns="0" bIns="0" rtlCol="0" anchor="ctr"/>
-          <a:lstStyle/>
-          <a:p>
-            <a:pPr indent="0" marL="0">
-              <a:lnSpc>
-                <a:spcPts val="1700"/>
-              </a:lnSpc>
-              <a:buNone/>
-            </a:pPr>
-            <a:r>
-              <a:rPr lang="en-US" sz="1200" dirty="0">
-                <a:solidFill>
-                  <a:srgbClr val="C3C9E4"/>
-                </a:solidFill>
-                <a:latin typeface="Meiryo" pitchFamily="34" charset="0"/>
-                <a:ea typeface="Meiryo" pitchFamily="34" charset="-122"/>
-                <a:cs typeface="Meiryo" pitchFamily="34" charset="-120"/>
-              </a:rPr>
-              <a:t>役割分担と稼働の細部（全12項目）</a:t>
-            </a:r>
-            <a:endParaRPr lang="en-US" sz="1200" dirty="0"/>
-          </a:p>
-        </p:txBody>
-      </p:sp>
-      <p:sp>
-        <p:nvSpPr>
-          <p:cNvPr id="13" name="Text 11"/>
-          <p:cNvSpPr txBox="1"/>
-          <p:nvPr/>
-        </p:nvSpPr>
-        <p:spPr>
-          <a:xfrm>
-            <a:off x="640080" y="4937760"/>
-            <a:ext cx="10911535" cy="457200"/>
-          </a:xfrm>
-          <a:prstGeom prst="rect">
-            <a:avLst/>
-          </a:prstGeom>
-          <a:noFill/>
-          <a:ln/>
-        </p:spPr>
-        <p:txBody>
-          <a:bodyPr wrap="square" lIns="0" tIns="0" rIns="0" bIns="0" rtlCol="0" anchor="ctr"/>
-          <a:lstStyle/>
-          <a:p>
-            <a:pPr indent="0" marL="0">
-              <a:lnSpc>
-                <a:spcPts val="1700"/>
-              </a:lnSpc>
-              <a:buNone/>
-            </a:pPr>
-            <a:r>
-              <a:rPr lang="en-US" sz="1100" dirty="0">
-                <a:solidFill>
-                  <a:srgbClr val="8A93B8"/>
-                </a:solidFill>
-                <a:latin typeface="Meiryo" pitchFamily="34" charset="0"/>
-                <a:ea typeface="Meiryo" pitchFamily="34" charset="-122"/>
-                <a:cs typeface="Meiryo" pitchFamily="34" charset="-120"/>
-              </a:rPr>
-              <a:t>まだ売り上げが立っていない段階で数字を詰めると、かえって話がまとまりにくい。必要なタイミングで、そのつどご相談させてください。</a:t>
-            </a:r>
-            <a:endParaRPr lang="en-US" sz="1100" dirty="0"/>
-          </a:p>
-        </p:txBody>
-      </p:sp>
-      <p:sp>
-        <p:nvSpPr>
-          <p:cNvPr id="14" name="Text 12"/>
           <p:cNvSpPr txBox="1"/>
           <p:nvPr/>
         </p:nvSpPr>
@@ -10108,76 +9759,7 @@
       </p:sp>
       <p:sp>
         <p:nvSpPr>
-          <p:cNvPr id="12" name="Shape 10"/>
-          <p:cNvSpPr/>
-          <p:nvPr/>
-        </p:nvSpPr>
-        <p:spPr>
-          <a:xfrm>
-            <a:off x="640080" y="4892040"/>
-            <a:ext cx="10911535" cy="868680"/>
-          </a:xfrm>
-          <a:prstGeom prst="roundRect">
-            <a:avLst>
-              <a:gd name="adj" fmla="val 8421"/>
-            </a:avLst>
-          </a:prstGeom>
-          <a:solidFill>
-            <a:srgbClr val="EEF0FA"/>
-          </a:solidFill>
-          <a:ln w="12700">
-            <a:solidFill>
-              <a:srgbClr val="C9CFEA"/>
-            </a:solidFill>
-            <a:prstDash val="solid"/>
-          </a:ln>
-        </p:spPr>
-      </p:sp>
-      <p:sp>
-        <p:nvSpPr>
-          <p:cNvPr id="13" name="Text 11"/>
-          <p:cNvSpPr txBox="1"/>
-          <p:nvPr/>
-        </p:nvSpPr>
-        <p:spPr>
-          <a:xfrm>
-            <a:off x="960120" y="5120640"/>
-            <a:ext cx="10271455" cy="457200"/>
-          </a:xfrm>
-          <a:prstGeom prst="rect">
-            <a:avLst/>
-          </a:prstGeom>
-          <a:noFill/>
-          <a:ln/>
-        </p:spPr>
-        <p:txBody>
-          <a:bodyPr wrap="square" lIns="0" tIns="0" rIns="0" bIns="0" rtlCol="0" anchor="t"/>
-          <a:lstStyle/>
-          <a:p>
-            <a:pPr indent="0" marL="0">
-              <a:lnSpc>
-                <a:spcPts val="2200"/>
-              </a:lnSpc>
-              <a:buNone/>
-            </a:pPr>
-            <a:r>
-              <a:rPr lang="en-US" sz="1300" b="1" dirty="0">
-                <a:solidFill>
-                  <a:srgbClr val="1A2148"/>
-                </a:solidFill>
-                <a:latin typeface="Meiryo" pitchFamily="34" charset="0"/>
-                <a:ea typeface="Meiryo" pitchFamily="34" charset="-122"/>
-                <a:cs typeface="Meiryo" pitchFamily="34" charset="-120"/>
-              </a:rPr>
-              <a:t>精神科医・安全責任者は、すでに確保できています。安全対応3段階・尺度の使用条件も整理済みです。</a:t>
-            </a:r>
-            <a:endParaRPr lang="en-US" sz="1300" dirty="0"/>
-          </a:p>
-        </p:txBody>
-      </p:sp>
-      <p:sp>
-        <p:nvSpPr>
-          <p:cNvPr id="14" name="Text 12"/>
+          <p:cNvPr id="12" name="Text 10"/>
           <p:cNvSpPr txBox="1"/>
           <p:nvPr/>
         </p:nvSpPr>
@@ -10846,7 +10428,7 @@
                 <a:ea typeface="Meiryo" pitchFamily="34" charset="-122"/>
                 <a:cs typeface="Meiryo" pitchFamily="34" charset="-120"/>
               </a:rPr>
-              <a:t>個人有料版の役割は「お金を払ってでも続けたい人がいる」という実績づくりです。ここは正直にお伝えしておきます。</a:t>
+              <a:t>個人有料版の役割は「お金を払ってでも続けたい人がいる」という実績づくりです。</a:t>
             </a:r>
             <a:endParaRPr lang="en-US" sz="1300" dirty="0"/>
           </a:p>
@@ -11458,12 +11040,12 @@
         </p:nvSpPr>
         <p:spPr>
           <a:xfrm>
-            <a:off x="640080" y="4983480"/>
-            <a:ext cx="10911535" cy="822960"/>
+            <a:off x="640080" y="4937760"/>
+            <a:ext cx="10911535" cy="914400"/>
           </a:xfrm>
           <a:prstGeom prst="roundRect">
             <a:avLst>
-              <a:gd name="adj" fmla="val 8889"/>
+              <a:gd name="adj" fmla="val 8000"/>
             </a:avLst>
           </a:prstGeom>
           <a:solidFill>
@@ -11485,8 +11067,8 @@
         </p:nvSpPr>
         <p:spPr>
           <a:xfrm>
-            <a:off x="960120" y="5193792"/>
-            <a:ext cx="10271455" cy="457200"/>
+            <a:off x="960120" y="5120640"/>
+            <a:ext cx="10271455" cy="594360"/>
           </a:xfrm>
           <a:prstGeom prst="rect">
             <a:avLst/>
@@ -11500,7 +11082,7 @@
           <a:p>
             <a:pPr indent="0" marL="0">
               <a:lnSpc>
-                <a:spcPts val="2200"/>
+                <a:spcPts val="2100"/>
               </a:lnSpc>
               <a:buNone/>
             </a:pPr>
@@ -11513,7 +11095,7 @@
                 <a:ea typeface="Meiryo" pitchFamily="34" charset="-122"/>
                 <a:cs typeface="Meiryo" pitchFamily="34" charset="-120"/>
               </a:rPr>
-              <a:t>既存6法人・137事業所の就労定着支援（復職後6か月〜3年6か月）の枠に、夜間・休日オプションとして乗せられる形を想定しています。</a:t>
+              <a:t>対象は、休職から復職して働いている方です。企業には、再休職1件あたりの損失を自社で試算していただいたうえで、復職後3〜6か月の夜間・休日サポートとして提案します。</a:t>
             </a:r>
             <a:endParaRPr lang="en-US" sz="1250" dirty="0"/>
           </a:p>
@@ -12020,11 +11602,11 @@
         <p:spPr>
           <a:xfrm>
             <a:off x="640080" y="4800600"/>
-            <a:ext cx="10911535" cy="960120"/>
+            <a:ext cx="10911535" cy="777240"/>
           </a:xfrm>
           <a:prstGeom prst="roundRect">
             <a:avLst>
-              <a:gd name="adj" fmla="val 7619"/>
+              <a:gd name="adj" fmla="val 9412"/>
             </a:avLst>
           </a:prstGeom>
           <a:solidFill>
@@ -12046,8 +11628,8 @@
         </p:nvSpPr>
         <p:spPr>
           <a:xfrm>
-            <a:off x="960120" y="5010912"/>
-            <a:ext cx="10271455" cy="594360"/>
+            <a:off x="960120" y="5056632"/>
+            <a:ext cx="10271455" cy="320040"/>
           </a:xfrm>
           <a:prstGeom prst="rect">
             <a:avLst/>
@@ -12066,7 +11648,7 @@
               <a:buNone/>
             </a:pPr>
             <a:r>
-              <a:rPr lang="en-US" sz="1250" dirty="0">
+              <a:rPr lang="en-US" sz="1300" dirty="0">
                 <a:solidFill>
                   <a:srgbClr val="1A2148"/>
                 </a:solidFill>
@@ -12074,9 +11656,9 @@
                 <a:ea typeface="Meiryo" pitchFamily="34" charset="-122"/>
                 <a:cs typeface="Meiryo" pitchFamily="34" charset="-120"/>
               </a:rPr>
-              <a:t>法人営業は、個人向け有料サービスが始まってから始めます。試運転や本編の段階で、伊藤さんのつながりを先に使うことはしません。いつ・どう使うかは、伊藤さんご自身が決められる状態を保ちます。</a:t>
-            </a:r>
-            <a:endParaRPr lang="en-US" sz="1250" dirty="0"/>
+              <a:t>法人営業は、個人向け有料サービスが始まってから始めます。</a:t>
+            </a:r>
+            <a:endParaRPr lang="en-US" sz="1300" dirty="0"/>
           </a:p>
         </p:txBody>
       </p:sp>

--- a/docs/ヨルケア事業化プラン_伊藤さん_20260905.pptx
+++ b/docs/ヨルケア事業化プラン_伊藤さん_20260905.pptx
@@ -3334,7 +3334,7 @@
                 <a:ea typeface="Meiryo" pitchFamily="34" charset="-122"/>
                 <a:cs typeface="Meiryo" pitchFamily="34" charset="-120"/>
               </a:rPr>
-              <a:t>精神科医・安全責任者の役割範囲</a:t>
+              <a:t>モニター期間中の報酬</a:t>
             </a:r>
             <a:endParaRPr lang="en-US" sz="1150" dirty="0"/>
           </a:p>
@@ -3403,7 +3403,7 @@
                 <a:ea typeface="Meiryo" pitchFamily="34" charset="-122"/>
                 <a:cs typeface="Meiryo" pitchFamily="34" charset="-120"/>
               </a:rPr>
-              <a:t>測る指標</a:t>
+              <a:t>有料化・企業受注後の収益配分</a:t>
             </a:r>
             <a:endParaRPr lang="en-US" sz="1150" dirty="0"/>
           </a:p>
@@ -3472,7 +3472,7 @@
                 <a:ea typeface="Meiryo" pitchFamily="34" charset="-122"/>
                 <a:cs typeface="Meiryo" pitchFamily="34" charset="-120"/>
               </a:rPr>
-              <a:t>参加者情報の扱い</a:t>
+              <a:t>精神科医・安全責任者の役割範囲</a:t>
             </a:r>
             <a:endParaRPr lang="en-US" sz="1150" dirty="0"/>
           </a:p>
@@ -3541,7 +3541,7 @@
                 <a:ea typeface="Meiryo" pitchFamily="34" charset="-122"/>
                 <a:cs typeface="Meiryo" pitchFamily="34" charset="-120"/>
               </a:rPr>
-              <a:t>続ける・やめるの判断基準</a:t>
+              <a:t>測る指標</a:t>
             </a:r>
             <a:endParaRPr lang="en-US" sz="1150" dirty="0"/>
           </a:p>
@@ -3610,7 +3610,7 @@
                 <a:ea typeface="Meiryo" pitchFamily="34" charset="-122"/>
                 <a:cs typeface="Meiryo" pitchFamily="34" charset="-120"/>
               </a:rPr>
-              <a:t>判断する場をいつ持つか</a:t>
+              <a:t>エビデンスの証明方法</a:t>
             </a:r>
             <a:endParaRPr lang="en-US" sz="1150" dirty="0"/>
           </a:p>
@@ -3679,7 +3679,7 @@
                 <a:ea typeface="Meiryo" pitchFamily="34" charset="-122"/>
                 <a:cs typeface="Meiryo" pitchFamily="34" charset="-120"/>
               </a:rPr>
-              <a:t>ほか（全12項目）</a:t>
+              <a:t>参加者情報の扱い</a:t>
             </a:r>
             <a:endParaRPr lang="en-US" sz="1150" dirty="0"/>
           </a:p>
@@ -3688,6 +3688,213 @@
       <p:sp>
         <p:nvSpPr>
           <p:cNvPr id="22" name="Shape 20"/>
+          <p:cNvSpPr/>
+          <p:nvPr/>
+        </p:nvSpPr>
+        <p:spPr>
+          <a:xfrm>
+            <a:off x="3436544" y="3584448"/>
+            <a:ext cx="2522144" cy="676656"/>
+          </a:xfrm>
+          <a:prstGeom prst="roundRect">
+            <a:avLst>
+              <a:gd name="adj" fmla="val 10811"/>
+            </a:avLst>
+          </a:prstGeom>
+          <a:solidFill>
+            <a:srgbClr val="F2F4FB"/>
+          </a:solidFill>
+          <a:ln w="12700">
+            <a:solidFill>
+              <a:srgbClr val="D9DDEE"/>
+            </a:solidFill>
+            <a:prstDash val="solid"/>
+          </a:ln>
+        </p:spPr>
+      </p:sp>
+      <p:sp>
+        <p:nvSpPr>
+          <p:cNvPr id="23" name="Text 21"/>
+          <p:cNvSpPr txBox="1"/>
+          <p:nvPr/>
+        </p:nvSpPr>
+        <p:spPr>
+          <a:xfrm>
+            <a:off x="3637712" y="3712464"/>
+            <a:ext cx="2119808" cy="457200"/>
+          </a:xfrm>
+          <a:prstGeom prst="rect">
+            <a:avLst/>
+          </a:prstGeom>
+          <a:noFill/>
+          <a:ln/>
+        </p:spPr>
+        <p:txBody>
+          <a:bodyPr wrap="square" lIns="0" tIns="0" rIns="0" bIns="0" rtlCol="0" anchor="t"/>
+          <a:lstStyle/>
+          <a:p>
+            <a:pPr indent="0" marL="0">
+              <a:lnSpc>
+                <a:spcPts val="1700"/>
+              </a:lnSpc>
+              <a:buNone/>
+            </a:pPr>
+            <a:r>
+              <a:rPr lang="en-US" sz="1150" dirty="0">
+                <a:solidFill>
+                  <a:srgbClr val="1A2148"/>
+                </a:solidFill>
+                <a:latin typeface="Meiryo" pitchFamily="34" charset="0"/>
+                <a:ea typeface="Meiryo" pitchFamily="34" charset="-122"/>
+                <a:cs typeface="Meiryo" pitchFamily="34" charset="-120"/>
+              </a:rPr>
+              <a:t>続ける・やめるの判断基準</a:t>
+            </a:r>
+            <a:endParaRPr lang="en-US" sz="1150" dirty="0"/>
+          </a:p>
+        </p:txBody>
+      </p:sp>
+      <p:sp>
+        <p:nvSpPr>
+          <p:cNvPr id="24" name="Shape 22"/>
+          <p:cNvSpPr/>
+          <p:nvPr/>
+        </p:nvSpPr>
+        <p:spPr>
+          <a:xfrm>
+            <a:off x="6233008" y="3584448"/>
+            <a:ext cx="2522144" cy="676656"/>
+          </a:xfrm>
+          <a:prstGeom prst="roundRect">
+            <a:avLst>
+              <a:gd name="adj" fmla="val 10811"/>
+            </a:avLst>
+          </a:prstGeom>
+          <a:solidFill>
+            <a:srgbClr val="F2F4FB"/>
+          </a:solidFill>
+          <a:ln w="12700">
+            <a:solidFill>
+              <a:srgbClr val="D9DDEE"/>
+            </a:solidFill>
+            <a:prstDash val="solid"/>
+          </a:ln>
+        </p:spPr>
+      </p:sp>
+      <p:sp>
+        <p:nvSpPr>
+          <p:cNvPr id="25" name="Text 23"/>
+          <p:cNvSpPr txBox="1"/>
+          <p:nvPr/>
+        </p:nvSpPr>
+        <p:spPr>
+          <a:xfrm>
+            <a:off x="6434176" y="3712464"/>
+            <a:ext cx="2119808" cy="457200"/>
+          </a:xfrm>
+          <a:prstGeom prst="rect">
+            <a:avLst/>
+          </a:prstGeom>
+          <a:noFill/>
+          <a:ln/>
+        </p:spPr>
+        <p:txBody>
+          <a:bodyPr wrap="square" lIns="0" tIns="0" rIns="0" bIns="0" rtlCol="0" anchor="t"/>
+          <a:lstStyle/>
+          <a:p>
+            <a:pPr indent="0" marL="0">
+              <a:lnSpc>
+                <a:spcPts val="1700"/>
+              </a:lnSpc>
+              <a:buNone/>
+            </a:pPr>
+            <a:r>
+              <a:rPr lang="en-US" sz="1150" dirty="0">
+                <a:solidFill>
+                  <a:srgbClr val="1A2148"/>
+                </a:solidFill>
+                <a:latin typeface="Meiryo" pitchFamily="34" charset="0"/>
+                <a:ea typeface="Meiryo" pitchFamily="34" charset="-122"/>
+                <a:cs typeface="Meiryo" pitchFamily="34" charset="-120"/>
+              </a:rPr>
+              <a:t>判断する場をいつ持つか</a:t>
+            </a:r>
+            <a:endParaRPr lang="en-US" sz="1150" dirty="0"/>
+          </a:p>
+        </p:txBody>
+      </p:sp>
+      <p:sp>
+        <p:nvSpPr>
+          <p:cNvPr id="26" name="Shape 24"/>
+          <p:cNvSpPr/>
+          <p:nvPr/>
+        </p:nvSpPr>
+        <p:spPr>
+          <a:xfrm>
+            <a:off x="9029471" y="3584448"/>
+            <a:ext cx="2522144" cy="676656"/>
+          </a:xfrm>
+          <a:prstGeom prst="roundRect">
+            <a:avLst>
+              <a:gd name="adj" fmla="val 10811"/>
+            </a:avLst>
+          </a:prstGeom>
+          <a:solidFill>
+            <a:srgbClr val="F2F4FB"/>
+          </a:solidFill>
+          <a:ln w="12700">
+            <a:solidFill>
+              <a:srgbClr val="D9DDEE"/>
+            </a:solidFill>
+            <a:prstDash val="solid"/>
+          </a:ln>
+        </p:spPr>
+      </p:sp>
+      <p:sp>
+        <p:nvSpPr>
+          <p:cNvPr id="27" name="Text 25"/>
+          <p:cNvSpPr txBox="1"/>
+          <p:nvPr/>
+        </p:nvSpPr>
+        <p:spPr>
+          <a:xfrm>
+            <a:off x="9230639" y="3712464"/>
+            <a:ext cx="2119808" cy="457200"/>
+          </a:xfrm>
+          <a:prstGeom prst="rect">
+            <a:avLst/>
+          </a:prstGeom>
+          <a:noFill/>
+          <a:ln/>
+        </p:spPr>
+        <p:txBody>
+          <a:bodyPr wrap="square" lIns="0" tIns="0" rIns="0" bIns="0" rtlCol="0" anchor="t"/>
+          <a:lstStyle/>
+          <a:p>
+            <a:pPr indent="0" marL="0">
+              <a:lnSpc>
+                <a:spcPts val="1700"/>
+              </a:lnSpc>
+              <a:buNone/>
+            </a:pPr>
+            <a:r>
+              <a:rPr lang="en-US" sz="1150" dirty="0">
+                <a:solidFill>
+                  <a:srgbClr val="1A2148"/>
+                </a:solidFill>
+                <a:latin typeface="Meiryo" pitchFamily="34" charset="0"/>
+                <a:ea typeface="Meiryo" pitchFamily="34" charset="-122"/>
+                <a:cs typeface="Meiryo" pitchFamily="34" charset="-120"/>
+              </a:rPr>
+              <a:t>ほか</a:t>
+            </a:r>
+            <a:endParaRPr lang="en-US" sz="1150" dirty="0"/>
+          </a:p>
+        </p:txBody>
+      </p:sp>
+      <p:sp>
+        <p:nvSpPr>
+          <p:cNvPr id="28" name="Shape 26"/>
           <p:cNvSpPr/>
           <p:nvPr/>
         </p:nvSpPr>
@@ -3714,7 +3921,7 @@
       </p:sp>
       <p:sp>
         <p:nvSpPr>
-          <p:cNvPr id="23" name="Text 21"/>
+          <p:cNvPr id="29" name="Text 27"/>
           <p:cNvSpPr txBox="1"/>
           <p:nvPr/>
         </p:nvSpPr>
@@ -3756,7 +3963,7 @@
       </p:sp>
       <p:sp>
         <p:nvSpPr>
-          <p:cNvPr id="24" name="Text 22"/>
+          <p:cNvPr id="30" name="Text 28"/>
           <p:cNvSpPr txBox="1"/>
           <p:nvPr/>
         </p:nvSpPr>
